--- a/SAS_presentation/SAS_Presentation.pptx
+++ b/SAS_presentation/SAS_Presentation.pptx
@@ -5,10 +5,10 @@
     <p:sldMasterId id="2147483900" r:id="rId1"/>
   </p:sldMasterIdLst>
   <p:notesMasterIdLst>
-    <p:notesMasterId r:id="rId15"/>
+    <p:notesMasterId r:id="rId16"/>
   </p:notesMasterIdLst>
   <p:handoutMasterIdLst>
-    <p:handoutMasterId r:id="rId16"/>
+    <p:handoutMasterId r:id="rId17"/>
   </p:handoutMasterIdLst>
   <p:sldIdLst>
     <p:sldId id="258" r:id="rId2"/>
@@ -16,14 +16,15 @@
     <p:sldId id="284" r:id="rId4"/>
     <p:sldId id="278" r:id="rId5"/>
     <p:sldId id="276" r:id="rId6"/>
-    <p:sldId id="275" r:id="rId7"/>
-    <p:sldId id="279" r:id="rId8"/>
-    <p:sldId id="280" r:id="rId9"/>
-    <p:sldId id="281" r:id="rId10"/>
-    <p:sldId id="282" r:id="rId11"/>
-    <p:sldId id="283" r:id="rId12"/>
-    <p:sldId id="268" r:id="rId13"/>
-    <p:sldId id="273" r:id="rId14"/>
+    <p:sldId id="285" r:id="rId7"/>
+    <p:sldId id="275" r:id="rId8"/>
+    <p:sldId id="279" r:id="rId9"/>
+    <p:sldId id="280" r:id="rId10"/>
+    <p:sldId id="281" r:id="rId11"/>
+    <p:sldId id="282" r:id="rId12"/>
+    <p:sldId id="283" r:id="rId13"/>
+    <p:sldId id="268" r:id="rId14"/>
+    <p:sldId id="273" r:id="rId15"/>
   </p:sldIdLst>
   <p:sldSz cx="9144000" cy="6858000" type="screen4x3"/>
   <p:notesSz cx="6797675" cy="9926638"/>
@@ -387,14 +388,14 @@
           </a:ln>
           <a:extLst>
             <a:ext uri="{909E8E84-426E-40dd-AFC4-6F175D3DCCD1}">
-              <a14:hiddenFill xmlns:a14="http://schemas.microsoft.com/office/drawing/2010/main" xmlns="">
+              <a14:hiddenFill xmlns="" xmlns:a14="http://schemas.microsoft.com/office/drawing/2010/main">
                 <a:solidFill>
                   <a:srgbClr val="FFFFFF"/>
                 </a:solidFill>
               </a14:hiddenFill>
             </a:ext>
             <a:ext uri="{91240B29-F687-4f45-9708-019B960494DF}">
-              <a14:hiddenLine xmlns:a14="http://schemas.microsoft.com/office/drawing/2010/main" xmlns="" w="9525">
+              <a14:hiddenLine xmlns="" xmlns:a14="http://schemas.microsoft.com/office/drawing/2010/main" w="9525">
                 <a:solidFill>
                   <a:srgbClr val="000000"/>
                 </a:solidFill>
@@ -447,14 +448,14 @@
           </a:ln>
           <a:extLst>
             <a:ext uri="{909E8E84-426E-40dd-AFC4-6F175D3DCCD1}">
-              <a14:hiddenFill xmlns:a14="http://schemas.microsoft.com/office/drawing/2010/main" xmlns="">
+              <a14:hiddenFill xmlns="" xmlns:a14="http://schemas.microsoft.com/office/drawing/2010/main">
                 <a:solidFill>
                   <a:srgbClr val="FFFFFF"/>
                 </a:solidFill>
               </a14:hiddenFill>
             </a:ext>
             <a:ext uri="{91240B29-F687-4f45-9708-019B960494DF}">
-              <a14:hiddenLine xmlns:a14="http://schemas.microsoft.com/office/drawing/2010/main" xmlns="" w="9525">
+              <a14:hiddenLine xmlns="" xmlns:a14="http://schemas.microsoft.com/office/drawing/2010/main" w="9525">
                 <a:solidFill>
                   <a:srgbClr val="000000"/>
                 </a:solidFill>
@@ -528,7 +529,7 @@
           </a:ln>
           <a:extLst>
             <a:ext uri="{909E8E84-426E-40dd-AFC4-6F175D3DCCD1}">
-              <a14:hiddenFill xmlns:a14="http://schemas.microsoft.com/office/drawing/2010/main" xmlns="">
+              <a14:hiddenFill xmlns="" xmlns:a14="http://schemas.microsoft.com/office/drawing/2010/main">
                 <a:noFill/>
               </a14:hiddenFill>
             </a:ext>
@@ -568,7 +569,7 @@
           </a:ln>
           <a:extLst>
             <a:ext uri="{91240B29-F687-4f45-9708-019B960494DF}">
-              <a14:hiddenLine xmlns:a14="http://schemas.microsoft.com/office/drawing/2010/main" xmlns="" w="9525">
+              <a14:hiddenLine xmlns="" xmlns:a14="http://schemas.microsoft.com/office/drawing/2010/main" w="9525">
                 <a:solidFill>
                   <a:srgbClr val="000000"/>
                 </a:solidFill>
@@ -614,7 +615,7 @@
           </a:ln>
           <a:extLst>
             <a:ext uri="{909E8E84-426E-40dd-AFC4-6F175D3DCCD1}">
-              <a14:hiddenFill xmlns:a14="http://schemas.microsoft.com/office/drawing/2010/main" xmlns="">
+              <a14:hiddenFill xmlns="" xmlns:a14="http://schemas.microsoft.com/office/drawing/2010/main">
                 <a:noFill/>
               </a14:hiddenFill>
             </a:ext>
@@ -655,7 +656,7 @@
           </a:ln>
           <a:extLst>
             <a:ext uri="{909E8E84-426E-40dd-AFC4-6F175D3DCCD1}">
-              <a14:hiddenFill xmlns:a14="http://schemas.microsoft.com/office/drawing/2010/main" xmlns="">
+              <a14:hiddenFill xmlns="" xmlns:a14="http://schemas.microsoft.com/office/drawing/2010/main">
                 <a:noFill/>
               </a14:hiddenFill>
             </a:ext>
@@ -704,14 +705,14 @@
           </a:ln>
           <a:extLst>
             <a:ext uri="{909E8E84-426E-40dd-AFC4-6F175D3DCCD1}">
-              <a14:hiddenFill xmlns:a14="http://schemas.microsoft.com/office/drawing/2010/main" xmlns="">
+              <a14:hiddenFill xmlns="" xmlns:a14="http://schemas.microsoft.com/office/drawing/2010/main">
                 <a:solidFill>
                   <a:srgbClr val="FFFFFF"/>
                 </a:solidFill>
               </a14:hiddenFill>
             </a:ext>
             <a:ext uri="{91240B29-F687-4f45-9708-019B960494DF}">
-              <a14:hiddenLine xmlns:a14="http://schemas.microsoft.com/office/drawing/2010/main" xmlns="" w="9525">
+              <a14:hiddenLine xmlns="" xmlns:a14="http://schemas.microsoft.com/office/drawing/2010/main" w="9525">
                 <a:solidFill>
                   <a:srgbClr val="000000"/>
                 </a:solidFill>
@@ -789,7 +790,7 @@
           </a:ln>
           <a:extLst>
             <a:ext uri="{909E8E84-426E-40dd-AFC4-6F175D3DCCD1}">
-              <a14:hiddenFill xmlns:a14="http://schemas.microsoft.com/office/drawing/2010/main" xmlns="">
+              <a14:hiddenFill xmlns="" xmlns:a14="http://schemas.microsoft.com/office/drawing/2010/main">
                 <a:solidFill>
                   <a:srgbClr val="FFFFFF"/>
                 </a:solidFill>
@@ -1017,14 +1018,14 @@
           </a:ln>
           <a:extLst>
             <a:ext uri="{909E8E84-426E-40dd-AFC4-6F175D3DCCD1}">
-              <a14:hiddenFill xmlns:a14="http://schemas.microsoft.com/office/drawing/2010/main" xmlns="">
+              <a14:hiddenFill xmlns="" xmlns:a14="http://schemas.microsoft.com/office/drawing/2010/main">
                 <a:solidFill>
                   <a:srgbClr val="FFFFFF"/>
                 </a:solidFill>
               </a14:hiddenFill>
             </a:ext>
             <a:ext uri="{91240B29-F687-4f45-9708-019B960494DF}">
-              <a14:hiddenLine xmlns:a14="http://schemas.microsoft.com/office/drawing/2010/main" xmlns="" w="9525">
+              <a14:hiddenLine xmlns="" xmlns:a14="http://schemas.microsoft.com/office/drawing/2010/main" w="9525">
                 <a:solidFill>
                   <a:srgbClr val="000000"/>
                 </a:solidFill>
@@ -1079,14 +1080,14 @@
           </a:ln>
           <a:extLst>
             <a:ext uri="{909E8E84-426E-40dd-AFC4-6F175D3DCCD1}">
-              <a14:hiddenFill xmlns:a14="http://schemas.microsoft.com/office/drawing/2010/main" xmlns="">
+              <a14:hiddenFill xmlns="" xmlns:a14="http://schemas.microsoft.com/office/drawing/2010/main">
                 <a:solidFill>
                   <a:srgbClr val="FFFFFF"/>
                 </a:solidFill>
               </a14:hiddenFill>
             </a:ext>
             <a:ext uri="{91240B29-F687-4f45-9708-019B960494DF}">
-              <a14:hiddenLine xmlns:a14="http://schemas.microsoft.com/office/drawing/2010/main" xmlns="" w="9525">
+              <a14:hiddenLine xmlns="" xmlns:a14="http://schemas.microsoft.com/office/drawing/2010/main" w="9525">
                 <a:solidFill>
                   <a:srgbClr val="000000"/>
                 </a:solidFill>
@@ -1164,7 +1165,7 @@
           </a:ln>
           <a:extLst>
             <a:ext uri="{909E8E84-426E-40dd-AFC4-6F175D3DCCD1}">
-              <a14:hiddenFill xmlns:a14="http://schemas.microsoft.com/office/drawing/2010/main" xmlns="">
+              <a14:hiddenFill xmlns="" xmlns:a14="http://schemas.microsoft.com/office/drawing/2010/main">
                 <a:noFill/>
               </a14:hiddenFill>
             </a:ext>
@@ -1204,7 +1205,7 @@
           </a:ln>
           <a:extLst>
             <a:ext uri="{91240B29-F687-4f45-9708-019B960494DF}">
-              <a14:hiddenLine xmlns:a14="http://schemas.microsoft.com/office/drawing/2010/main" xmlns="" w="9525">
+              <a14:hiddenLine xmlns="" xmlns:a14="http://schemas.microsoft.com/office/drawing/2010/main" w="9525">
                 <a:solidFill>
                   <a:srgbClr val="000000"/>
                 </a:solidFill>
@@ -1250,7 +1251,7 @@
           </a:ln>
           <a:extLst>
             <a:ext uri="{909E8E84-426E-40dd-AFC4-6F175D3DCCD1}">
-              <a14:hiddenFill xmlns:a14="http://schemas.microsoft.com/office/drawing/2010/main" xmlns="">
+              <a14:hiddenFill xmlns="" xmlns:a14="http://schemas.microsoft.com/office/drawing/2010/main">
                 <a:noFill/>
               </a14:hiddenFill>
             </a:ext>
@@ -1291,7 +1292,7 @@
           </a:ln>
           <a:extLst>
             <a:ext uri="{909E8E84-426E-40dd-AFC4-6F175D3DCCD1}">
-              <a14:hiddenFill xmlns:a14="http://schemas.microsoft.com/office/drawing/2010/main" xmlns="">
+              <a14:hiddenFill xmlns="" xmlns:a14="http://schemas.microsoft.com/office/drawing/2010/main">
                 <a:noFill/>
               </a14:hiddenFill>
             </a:ext>
@@ -1340,14 +1341,14 @@
           </a:ln>
           <a:extLst>
             <a:ext uri="{909E8E84-426E-40dd-AFC4-6F175D3DCCD1}">
-              <a14:hiddenFill xmlns:a14="http://schemas.microsoft.com/office/drawing/2010/main" xmlns="">
+              <a14:hiddenFill xmlns="" xmlns:a14="http://schemas.microsoft.com/office/drawing/2010/main">
                 <a:solidFill>
                   <a:srgbClr val="FFFFFF"/>
                 </a:solidFill>
               </a14:hiddenFill>
             </a:ext>
             <a:ext uri="{91240B29-F687-4f45-9708-019B960494DF}">
-              <a14:hiddenLine xmlns:a14="http://schemas.microsoft.com/office/drawing/2010/main" xmlns="" w="9525">
+              <a14:hiddenLine xmlns="" xmlns:a14="http://schemas.microsoft.com/office/drawing/2010/main" w="9525">
                 <a:solidFill>
                   <a:srgbClr val="000000"/>
                 </a:solidFill>
@@ -1537,7 +1538,7 @@
           </a:ln>
           <a:extLst>
             <a:ext uri="{909E8E84-426E-40dd-AFC4-6F175D3DCCD1}">
-              <a14:hiddenFill xmlns:a14="http://schemas.microsoft.com/office/drawing/2010/main" xmlns="">
+              <a14:hiddenFill xmlns="" xmlns:a14="http://schemas.microsoft.com/office/drawing/2010/main">
                 <a:noFill/>
               </a14:hiddenFill>
             </a:ext>
@@ -3649,14 +3650,14 @@
           </a:ln>
           <a:extLst>
             <a:ext uri="{909E8E84-426E-40dd-AFC4-6F175D3DCCD1}">
-              <a14:hiddenFill xmlns:a14="http://schemas.microsoft.com/office/drawing/2010/main" xmlns="">
+              <a14:hiddenFill xmlns="" xmlns:a14="http://schemas.microsoft.com/office/drawing/2010/main">
                 <a:solidFill>
                   <a:srgbClr val="FFFFFF"/>
                 </a:solidFill>
               </a14:hiddenFill>
             </a:ext>
             <a:ext uri="{91240B29-F687-4f45-9708-019B960494DF}">
-              <a14:hiddenLine xmlns:a14="http://schemas.microsoft.com/office/drawing/2010/main" xmlns="" w="9525">
+              <a14:hiddenLine xmlns="" xmlns:a14="http://schemas.microsoft.com/office/drawing/2010/main" w="9525">
                 <a:solidFill>
                   <a:srgbClr val="000000"/>
                 </a:solidFill>
@@ -3707,14 +3708,14 @@
           </a:ln>
           <a:extLst>
             <a:ext uri="{909E8E84-426E-40dd-AFC4-6F175D3DCCD1}">
-              <a14:hiddenFill xmlns:a14="http://schemas.microsoft.com/office/drawing/2010/main" xmlns="">
+              <a14:hiddenFill xmlns="" xmlns:a14="http://schemas.microsoft.com/office/drawing/2010/main">
                 <a:solidFill>
                   <a:srgbClr val="FFFFFF"/>
                 </a:solidFill>
               </a14:hiddenFill>
             </a:ext>
             <a:ext uri="{91240B29-F687-4f45-9708-019B960494DF}">
-              <a14:hiddenLine xmlns:a14="http://schemas.microsoft.com/office/drawing/2010/main" xmlns="" w="9525">
+              <a14:hiddenLine xmlns="" xmlns:a14="http://schemas.microsoft.com/office/drawing/2010/main" w="9525">
                 <a:solidFill>
                   <a:srgbClr val="000000"/>
                 </a:solidFill>
@@ -3951,7 +3952,7 @@
           </a:ln>
           <a:extLst>
             <a:ext uri="{909E8E84-426E-40dd-AFC4-6F175D3DCCD1}">
-              <a14:hiddenFill xmlns:a14="http://schemas.microsoft.com/office/drawing/2010/main" xmlns="">
+              <a14:hiddenFill xmlns="" xmlns:a14="http://schemas.microsoft.com/office/drawing/2010/main">
                 <a:noFill/>
               </a14:hiddenFill>
             </a:ext>
@@ -4782,6 +4783,342 @@
         <p:cNvPr id="1" name="">
           <a:extLst>
             <a:ext uri="{FF2B5EF4-FFF2-40B4-BE49-F238E27FC236}">
+              <a16:creationId xmlns:a16="http://schemas.microsoft.com/office/drawing/2014/main" id="{76E3105A-C4D2-892A-4EB4-12716E07B0CC}"/>
+            </a:ext>
+          </a:extLst>
+        </p:cNvPr>
+        <p:cNvGrpSpPr/>
+        <p:nvPr/>
+      </p:nvGrpSpPr>
+      <p:grpSpPr>
+        <a:xfrm>
+          <a:off x="0" y="0"/>
+          <a:ext cx="0" cy="0"/>
+          <a:chOff x="0" y="0"/>
+          <a:chExt cx="0" cy="0"/>
+        </a:xfrm>
+      </p:grpSpPr>
+      <p:sp>
+        <p:nvSpPr>
+          <p:cNvPr id="4" name="Нижний колонтитул 3">
+            <a:extLst>
+              <a:ext uri="{FF2B5EF4-FFF2-40B4-BE49-F238E27FC236}">
+                <a16:creationId xmlns:a16="http://schemas.microsoft.com/office/drawing/2014/main" id="{E1BBCD59-FA68-9F40-CEEA-9E98F6C41B6F}"/>
+              </a:ext>
+            </a:extLst>
+          </p:cNvPr>
+          <p:cNvSpPr>
+            <a:spLocks noGrp="1"/>
+          </p:cNvSpPr>
+          <p:nvPr>
+            <p:ph type="ftr" sz="quarter" idx="10"/>
+          </p:nvPr>
+        </p:nvSpPr>
+        <p:spPr/>
+        <p:txBody>
+          <a:bodyPr/>
+          <a:lstStyle/>
+          <a:p>
+            <a:pPr>
+              <a:defRPr/>
+            </a:pPr>
+            <a:r>
+              <a:rPr lang="de-DE" dirty="0"/>
+              <a:t>Oleg Kelner – University </a:t>
+            </a:r>
+            <a:r>
+              <a:rPr lang="de-DE" dirty="0" err="1"/>
+              <a:t>of</a:t>
+            </a:r>
+            <a:r>
+              <a:rPr lang="de-DE" dirty="0"/>
+              <a:t> Applied Sciences Hamm-Lippstadt</a:t>
+            </a:r>
+          </a:p>
+        </p:txBody>
+      </p:sp>
+      <p:sp>
+        <p:nvSpPr>
+          <p:cNvPr id="5" name="Дата 4">
+            <a:extLst>
+              <a:ext uri="{FF2B5EF4-FFF2-40B4-BE49-F238E27FC236}">
+                <a16:creationId xmlns:a16="http://schemas.microsoft.com/office/drawing/2014/main" id="{96A274D8-6209-481A-040E-F235ADFCAA2B}"/>
+              </a:ext>
+            </a:extLst>
+          </p:cNvPr>
+          <p:cNvSpPr>
+            <a:spLocks noGrp="1"/>
+          </p:cNvSpPr>
+          <p:nvPr>
+            <p:ph type="dt" sz="half" idx="12"/>
+          </p:nvPr>
+        </p:nvSpPr>
+        <p:spPr/>
+        <p:txBody>
+          <a:bodyPr/>
+          <a:lstStyle/>
+          <a:p>
+            <a:pPr>
+              <a:defRPr/>
+            </a:pPr>
+            <a:fld id="{D1C5E747-687F-9C49-A498-1184E7908D39}" type="datetime1">
+              <a:rPr lang="de-DE" smtClean="0"/>
+              <a:t>29.06.2026</a:t>
+            </a:fld>
+            <a:endParaRPr lang="de-DE"/>
+          </a:p>
+        </p:txBody>
+      </p:sp>
+      <p:sp>
+        <p:nvSpPr>
+          <p:cNvPr id="6" name="Номер слайда 5">
+            <a:extLst>
+              <a:ext uri="{FF2B5EF4-FFF2-40B4-BE49-F238E27FC236}">
+                <a16:creationId xmlns:a16="http://schemas.microsoft.com/office/drawing/2014/main" id="{E3F7F71E-E821-E6EF-CB50-76F0653A30FF}"/>
+              </a:ext>
+            </a:extLst>
+          </p:cNvPr>
+          <p:cNvSpPr>
+            <a:spLocks noGrp="1"/>
+          </p:cNvSpPr>
+          <p:nvPr>
+            <p:ph type="sldNum" sz="quarter" idx="13"/>
+          </p:nvPr>
+        </p:nvSpPr>
+        <p:spPr/>
+        <p:txBody>
+          <a:bodyPr/>
+          <a:lstStyle/>
+          <a:p>
+            <a:pPr>
+              <a:defRPr/>
+            </a:pPr>
+            <a:r>
+              <a:rPr lang="de-DE"/>
+              <a:t>&lt; </a:t>
+            </a:r>
+            <a:fld id="{1A61C92B-C297-4AC9-B551-2D8A658A0122}" type="slidenum">
+              <a:rPr lang="de-DE" smtClean="0"/>
+              <a:pPr>
+                <a:defRPr/>
+              </a:pPr>
+              <a:t>10</a:t>
+            </a:fld>
+            <a:r>
+              <a:rPr lang="de-DE"/>
+              <a:t> &gt;</a:t>
+            </a:r>
+            <a:endParaRPr lang="de-DE" dirty="0"/>
+          </a:p>
+        </p:txBody>
+      </p:sp>
+      <p:sp>
+        <p:nvSpPr>
+          <p:cNvPr id="7" name="Заголовок 1">
+            <a:extLst>
+              <a:ext uri="{FF2B5EF4-FFF2-40B4-BE49-F238E27FC236}">
+                <a16:creationId xmlns:a16="http://schemas.microsoft.com/office/drawing/2014/main" id="{6A229989-FD2A-1B0C-3F55-891E3511A7C8}"/>
+              </a:ext>
+            </a:extLst>
+          </p:cNvPr>
+          <p:cNvSpPr>
+            <a:spLocks noGrp="1"/>
+          </p:cNvSpPr>
+          <p:nvPr>
+            <p:ph type="ctrTitle"/>
+          </p:nvPr>
+        </p:nvSpPr>
+        <p:spPr>
+          <a:xfrm>
+            <a:off x="395536" y="188640"/>
+            <a:ext cx="7324934" cy="492443"/>
+          </a:xfrm>
+        </p:spPr>
+        <p:txBody>
+          <a:bodyPr/>
+          <a:lstStyle/>
+          <a:p>
+            <a:r>
+              <a:rPr lang="en-US" sz="3200" dirty="0"/>
+              <a:t>Implementation</a:t>
+            </a:r>
+          </a:p>
+        </p:txBody>
+      </p:sp>
+      <p:pic>
+        <p:nvPicPr>
+          <p:cNvPr id="3" name="Рисунок 2">
+            <a:extLst>
+              <a:ext uri="{FF2B5EF4-FFF2-40B4-BE49-F238E27FC236}">
+                <a16:creationId xmlns:a16="http://schemas.microsoft.com/office/drawing/2014/main" id="{B076BC7C-FB22-1658-A6E7-58632D4E9D57}"/>
+              </a:ext>
+            </a:extLst>
+          </p:cNvPr>
+          <p:cNvPicPr>
+            <a:picLocks noChangeAspect="1"/>
+          </p:cNvPicPr>
+          <p:nvPr/>
+        </p:nvPicPr>
+        <p:blipFill>
+          <a:blip r:embed="rId2"/>
+          <a:srcRect/>
+          <a:stretch/>
+        </p:blipFill>
+        <p:spPr>
+          <a:xfrm>
+            <a:off x="791999" y="968735"/>
+            <a:ext cx="7560000" cy="5400000"/>
+          </a:xfrm>
+          <a:prstGeom prst="rect">
+            <a:avLst/>
+          </a:prstGeom>
+        </p:spPr>
+      </p:pic>
+      <mc:AlternateContent xmlns:mc="http://schemas.openxmlformats.org/markup-compatibility/2006" xmlns:a14="http://schemas.microsoft.com/office/drawing/2010/main">
+        <mc:Choice Requires="a14">
+          <p:sp>
+            <p:nvSpPr>
+              <p:cNvPr id="8" name="TextBox 7">
+                <a:extLst>
+                  <a:ext uri="{FF2B5EF4-FFF2-40B4-BE49-F238E27FC236}">
+                    <a16:creationId xmlns:a16="http://schemas.microsoft.com/office/drawing/2014/main" id="{00135A5B-A4E8-6770-7B60-12D1E97CCF10}"/>
+                  </a:ext>
+                </a:extLst>
+              </p:cNvPr>
+              <p:cNvSpPr txBox="1"/>
+              <p:nvPr/>
+            </p:nvSpPr>
+            <p:spPr>
+              <a:xfrm>
+                <a:off x="-360548" y="5868598"/>
+                <a:ext cx="4576396" cy="500137"/>
+              </a:xfrm>
+              <a:prstGeom prst="rect">
+                <a:avLst/>
+              </a:prstGeom>
+              <a:noFill/>
+            </p:spPr>
+            <p:txBody>
+              <a:bodyPr wrap="square">
+                <a:spAutoFit/>
+              </a:bodyPr>
+              <a:lstStyle/>
+              <a:p>
+                <a:pPr>
+                  <a:lnSpc>
+                    <a:spcPct val="150000"/>
+                  </a:lnSpc>
+                </a:pPr>
+                <a14:m>
+                  <m:oMathPara xmlns:m="http://schemas.openxmlformats.org/officeDocument/2006/math">
+                    <m:oMathParaPr>
+                      <m:jc m:val="centerGroup"/>
+                    </m:oMathParaPr>
+                    <m:oMath xmlns:m="http://schemas.openxmlformats.org/officeDocument/2006/math">
+                      <m:r>
+                        <a:rPr lang="en-US" sz="1600" b="0" i="1" smtClean="0">
+                          <a:latin typeface="Cambria Math" panose="02040503050406030204" pitchFamily="18" charset="0"/>
+                        </a:rPr>
+                        <m:t>𝐶</m:t>
+                      </m:r>
+                      <m:r>
+                        <a:rPr lang="en-US" sz="1600" b="0" i="1" smtClean="0">
+                          <a:latin typeface="Cambria Math" panose="02040503050406030204" pitchFamily="18" charset="0"/>
+                        </a:rPr>
+                        <m:t>=0.25∗</m:t>
+                      </m:r>
+                      <m:r>
+                        <a:rPr lang="en-US" sz="1600" b="0" i="1" smtClean="0">
+                          <a:latin typeface="Cambria Math" panose="02040503050406030204" pitchFamily="18" charset="0"/>
+                        </a:rPr>
+                        <m:t>𝑙𝑎𝑡𝑒𝑛𝑐𝑦</m:t>
+                      </m:r>
+                      <m:r>
+                        <a:rPr lang="en-US" sz="1600" b="0" i="1" smtClean="0">
+                          <a:latin typeface="Cambria Math" panose="02040503050406030204" pitchFamily="18" charset="0"/>
+                        </a:rPr>
+                        <m:t>+0.75∗</m:t>
+                      </m:r>
+                      <m:r>
+                        <a:rPr lang="en-US" sz="1600" b="0" i="1" smtClean="0">
+                          <a:latin typeface="Cambria Math" panose="02040503050406030204" pitchFamily="18" charset="0"/>
+                        </a:rPr>
+                        <m:t>𝑎𝑟𝑒𝑎</m:t>
+                      </m:r>
+                    </m:oMath>
+                  </m:oMathPara>
+                </a14:m>
+                <a:endParaRPr lang="en-US" sz="1600" dirty="0"/>
+              </a:p>
+            </p:txBody>
+          </p:sp>
+        </mc:Choice>
+        <mc:Fallback xmlns="">
+          <p:sp>
+            <p:nvSpPr>
+              <p:cNvPr id="8" name="TextBox 7">
+                <a:extLst>
+                  <a:ext uri="{FF2B5EF4-FFF2-40B4-BE49-F238E27FC236}">
+                    <a16:creationId xmlns:a16="http://schemas.microsoft.com/office/drawing/2014/main" id="{00135A5B-A4E8-6770-7B60-12D1E97CCF10}"/>
+                  </a:ext>
+                </a:extLst>
+              </p:cNvPr>
+              <p:cNvSpPr txBox="1">
+                <a:spLocks noRot="1" noChangeAspect="1" noMove="1" noResize="1" noEditPoints="1" noAdjustHandles="1" noChangeArrowheads="1" noChangeShapeType="1" noTextEdit="1"/>
+              </p:cNvSpPr>
+              <p:nvPr/>
+            </p:nvSpPr>
+            <p:spPr>
+              <a:xfrm>
+                <a:off x="-360548" y="5868598"/>
+                <a:ext cx="4576396" cy="500137"/>
+              </a:xfrm>
+              <a:prstGeom prst="rect">
+                <a:avLst/>
+              </a:prstGeom>
+              <a:blipFill>
+                <a:blip r:embed="rId3"/>
+                <a:stretch>
+                  <a:fillRect/>
+                </a:stretch>
+              </a:blipFill>
+            </p:spPr>
+            <p:txBody>
+              <a:bodyPr/>
+              <a:lstStyle/>
+              <a:p>
+                <a:r>
+                  <a:rPr lang="en-US">
+                    <a:noFill/>
+                  </a:rPr>
+                  <a:t> </a:t>
+                </a:r>
+              </a:p>
+            </p:txBody>
+          </p:sp>
+        </mc:Fallback>
+      </mc:AlternateContent>
+    </p:spTree>
+    <p:extLst>
+      <p:ext uri="{BB962C8B-B14F-4D97-AF65-F5344CB8AC3E}">
+        <p14:creationId xmlns:p14="http://schemas.microsoft.com/office/powerpoint/2010/main" val="4089268273"/>
+      </p:ext>
+    </p:extLst>
+  </p:cSld>
+  <p:clrMapOvr>
+    <a:masterClrMapping/>
+  </p:clrMapOvr>
+</p:sld>
+</file>
+
+<file path=ppt/slides/slide11.xml><?xml version="1.0" encoding="utf-8"?>
+<p:sld xmlns:a="http://schemas.openxmlformats.org/drawingml/2006/main" xmlns:r="http://schemas.openxmlformats.org/officeDocument/2006/relationships" xmlns:p="http://schemas.openxmlformats.org/presentationml/2006/main">
+  <p:cSld>
+    <p:spTree>
+      <p:nvGrpSpPr>
+        <p:cNvPr id="1" name="">
+          <a:extLst>
+            <a:ext uri="{FF2B5EF4-FFF2-40B4-BE49-F238E27FC236}">
               <a16:creationId xmlns:a16="http://schemas.microsoft.com/office/drawing/2014/main" id="{2C8AB760-2930-751B-53EF-CDA354DA6C75}"/>
             </a:ext>
           </a:extLst>
@@ -4901,7 +5238,7 @@
               <a:pPr>
                 <a:defRPr/>
               </a:pPr>
-              <a:t>10</a:t>
+              <a:t>11</a:t>
             </a:fld>
             <a:r>
               <a:rPr lang="de-DE"/>
@@ -5110,7 +5447,7 @@
 </p:sld>
 </file>
 
-<file path=ppt/slides/slide11.xml><?xml version="1.0" encoding="utf-8"?>
+<file path=ppt/slides/slide12.xml><?xml version="1.0" encoding="utf-8"?>
 <p:sld xmlns:a="http://schemas.openxmlformats.org/drawingml/2006/main" xmlns:r="http://schemas.openxmlformats.org/officeDocument/2006/relationships" xmlns:p="http://schemas.openxmlformats.org/presentationml/2006/main">
   <p:cSld>
     <p:spTree>
@@ -5237,7 +5574,7 @@
               <a:pPr>
                 <a:defRPr/>
               </a:pPr>
-              <a:t>11</a:t>
+              <a:t>12</a:t>
             </a:fld>
             <a:r>
               <a:rPr lang="de-DE"/>
@@ -5796,7 +6133,7 @@
 </p:sld>
 </file>
 
-<file path=ppt/slides/slide12.xml><?xml version="1.0" encoding="utf-8"?>
+<file path=ppt/slides/slide13.xml><?xml version="1.0" encoding="utf-8"?>
 <p:sld xmlns:a="http://schemas.openxmlformats.org/drawingml/2006/main" xmlns:r="http://schemas.openxmlformats.org/officeDocument/2006/relationships" xmlns:p="http://schemas.openxmlformats.org/presentationml/2006/main">
   <p:cSld>
     <p:spTree>
@@ -5923,7 +6260,7 @@
               <a:pPr>
                 <a:defRPr/>
               </a:pPr>
-              <a:t>12</a:t>
+              <a:t>13</a:t>
             </a:fld>
             <a:r>
               <a:rPr lang="de-DE"/>
@@ -6053,7 +6390,7 @@
 </p:sld>
 </file>
 
-<file path=ppt/slides/slide13.xml><?xml version="1.0" encoding="utf-8"?>
+<file path=ppt/slides/slide14.xml><?xml version="1.0" encoding="utf-8"?>
 <p:sld xmlns:a="http://schemas.openxmlformats.org/drawingml/2006/main" xmlns:r="http://schemas.openxmlformats.org/officeDocument/2006/relationships" xmlns:p="http://schemas.openxmlformats.org/presentationml/2006/main">
   <p:cSld>
     <p:spTree>
@@ -6180,7 +6517,7 @@
               <a:pPr>
                 <a:defRPr/>
               </a:pPr>
-              <a:t>13</a:t>
+              <a:t>14</a:t>
             </a:fld>
             <a:r>
               <a:rPr lang="de-DE"/>
@@ -6768,8 +7105,8 @@
           </a:p>
         </p:txBody>
       </p:sp>
-      <mc:AlternateContent xmlns:mc="http://schemas.openxmlformats.org/markup-compatibility/2006">
-        <mc:Choice xmlns:a14="http://schemas.microsoft.com/office/drawing/2010/main" Requires="a14">
+      <mc:AlternateContent xmlns:mc="http://schemas.openxmlformats.org/markup-compatibility/2006" xmlns:a14="http://schemas.microsoft.com/office/drawing/2010/main">
+        <mc:Choice Requires="a14">
           <p:sp>
             <p:nvSpPr>
               <p:cNvPr id="12" name="TextBox 11">
@@ -7058,7 +7395,7 @@
             </p:txBody>
           </p:sp>
         </mc:Choice>
-        <mc:Fallback>
+        <mc:Fallback xmlns="">
           <p:sp>
             <p:nvSpPr>
               <p:cNvPr id="12" name="TextBox 11">
@@ -7286,8 +7623,8 @@
           </a:p>
         </p:txBody>
       </p:sp>
-      <mc:AlternateContent xmlns:mc="http://schemas.openxmlformats.org/markup-compatibility/2006">
-        <mc:Choice xmlns:a14="http://schemas.microsoft.com/office/drawing/2010/main" Requires="a14">
+      <mc:AlternateContent xmlns:mc="http://schemas.openxmlformats.org/markup-compatibility/2006" xmlns:a14="http://schemas.microsoft.com/office/drawing/2010/main">
+        <mc:Choice Requires="a14">
           <p:sp>
             <p:nvSpPr>
               <p:cNvPr id="12" name="TextBox 11">
@@ -7520,7 +7857,7 @@
             </p:txBody>
           </p:sp>
         </mc:Choice>
-        <mc:Fallback>
+        <mc:Fallback xmlns="">
           <p:sp>
             <p:nvSpPr>
               <p:cNvPr id="12" name="TextBox 11">
@@ -7770,7 +8107,7 @@
         </p:blipFill>
         <p:spPr>
           <a:xfrm>
-            <a:off x="2037089" y="1276589"/>
+            <a:off x="4355976" y="2118863"/>
             <a:ext cx="4041828" cy="3086739"/>
           </a:xfrm>
           <a:prstGeom prst="rect">
@@ -7800,7 +8137,7 @@
         </p:blipFill>
         <p:spPr>
           <a:xfrm>
-            <a:off x="395536" y="1276589"/>
+            <a:off x="1079612" y="1276588"/>
             <a:ext cx="1511453" cy="4771288"/>
           </a:xfrm>
           <a:prstGeom prst="rect">
@@ -7829,6 +8166,279 @@
         <p:cNvPr id="1" name="">
           <a:extLst>
             <a:ext uri="{FF2B5EF4-FFF2-40B4-BE49-F238E27FC236}">
+              <a16:creationId xmlns:a16="http://schemas.microsoft.com/office/drawing/2014/main" id="{EE7FEC26-0CB0-8CE0-ADD2-D324104856DC}"/>
+            </a:ext>
+          </a:extLst>
+        </p:cNvPr>
+        <p:cNvGrpSpPr/>
+        <p:nvPr/>
+      </p:nvGrpSpPr>
+      <p:grpSpPr>
+        <a:xfrm>
+          <a:off x="0" y="0"/>
+          <a:ext cx="0" cy="0"/>
+          <a:chOff x="0" y="0"/>
+          <a:chExt cx="0" cy="0"/>
+        </a:xfrm>
+      </p:grpSpPr>
+      <p:sp>
+        <p:nvSpPr>
+          <p:cNvPr id="4" name="Нижний колонтитул 3">
+            <a:extLst>
+              <a:ext uri="{FF2B5EF4-FFF2-40B4-BE49-F238E27FC236}">
+                <a16:creationId xmlns:a16="http://schemas.microsoft.com/office/drawing/2014/main" id="{2560FFB4-48D6-C986-8D4C-245468A0D5E4}"/>
+              </a:ext>
+            </a:extLst>
+          </p:cNvPr>
+          <p:cNvSpPr>
+            <a:spLocks noGrp="1"/>
+          </p:cNvSpPr>
+          <p:nvPr>
+            <p:ph type="ftr" sz="quarter" idx="10"/>
+          </p:nvPr>
+        </p:nvSpPr>
+        <p:spPr/>
+        <p:txBody>
+          <a:bodyPr/>
+          <a:lstStyle/>
+          <a:p>
+            <a:pPr>
+              <a:defRPr/>
+            </a:pPr>
+            <a:r>
+              <a:rPr lang="de-DE" dirty="0"/>
+              <a:t>Oleg Kelner – University </a:t>
+            </a:r>
+            <a:r>
+              <a:rPr lang="de-DE" dirty="0" err="1"/>
+              <a:t>of</a:t>
+            </a:r>
+            <a:r>
+              <a:rPr lang="de-DE" dirty="0"/>
+              <a:t> Applied Sciences Hamm-Lippstadt</a:t>
+            </a:r>
+          </a:p>
+        </p:txBody>
+      </p:sp>
+      <p:sp>
+        <p:nvSpPr>
+          <p:cNvPr id="5" name="Дата 4">
+            <a:extLst>
+              <a:ext uri="{FF2B5EF4-FFF2-40B4-BE49-F238E27FC236}">
+                <a16:creationId xmlns:a16="http://schemas.microsoft.com/office/drawing/2014/main" id="{51046D81-6EB0-1CA9-30B1-972DE34F8FDD}"/>
+              </a:ext>
+            </a:extLst>
+          </p:cNvPr>
+          <p:cNvSpPr>
+            <a:spLocks noGrp="1"/>
+          </p:cNvSpPr>
+          <p:nvPr>
+            <p:ph type="dt" sz="half" idx="12"/>
+          </p:nvPr>
+        </p:nvSpPr>
+        <p:spPr/>
+        <p:txBody>
+          <a:bodyPr/>
+          <a:lstStyle/>
+          <a:p>
+            <a:pPr>
+              <a:defRPr/>
+            </a:pPr>
+            <a:fld id="{D1C5E747-687F-9C49-A498-1184E7908D39}" type="datetime1">
+              <a:rPr lang="de-DE" smtClean="0"/>
+              <a:t>29.06.2026</a:t>
+            </a:fld>
+            <a:endParaRPr lang="de-DE"/>
+          </a:p>
+        </p:txBody>
+      </p:sp>
+      <p:sp>
+        <p:nvSpPr>
+          <p:cNvPr id="6" name="Номер слайда 5">
+            <a:extLst>
+              <a:ext uri="{FF2B5EF4-FFF2-40B4-BE49-F238E27FC236}">
+                <a16:creationId xmlns:a16="http://schemas.microsoft.com/office/drawing/2014/main" id="{B210D210-39A2-FEAF-9015-93526B2970C0}"/>
+              </a:ext>
+            </a:extLst>
+          </p:cNvPr>
+          <p:cNvSpPr>
+            <a:spLocks noGrp="1"/>
+          </p:cNvSpPr>
+          <p:nvPr>
+            <p:ph type="sldNum" sz="quarter" idx="13"/>
+          </p:nvPr>
+        </p:nvSpPr>
+        <p:spPr/>
+        <p:txBody>
+          <a:bodyPr/>
+          <a:lstStyle/>
+          <a:p>
+            <a:pPr>
+              <a:defRPr/>
+            </a:pPr>
+            <a:r>
+              <a:rPr lang="de-DE"/>
+              <a:t>&lt; </a:t>
+            </a:r>
+            <a:fld id="{1A61C92B-C297-4AC9-B551-2D8A658A0122}" type="slidenum">
+              <a:rPr lang="de-DE" smtClean="0"/>
+              <a:pPr>
+                <a:defRPr/>
+              </a:pPr>
+              <a:t>6</a:t>
+            </a:fld>
+            <a:r>
+              <a:rPr lang="de-DE"/>
+              <a:t> &gt;</a:t>
+            </a:r>
+            <a:endParaRPr lang="de-DE" dirty="0"/>
+          </a:p>
+        </p:txBody>
+      </p:sp>
+      <p:sp>
+        <p:nvSpPr>
+          <p:cNvPr id="7" name="Заголовок 1">
+            <a:extLst>
+              <a:ext uri="{FF2B5EF4-FFF2-40B4-BE49-F238E27FC236}">
+                <a16:creationId xmlns:a16="http://schemas.microsoft.com/office/drawing/2014/main" id="{177E6E9B-331B-686E-2280-6D84211CCBFD}"/>
+              </a:ext>
+            </a:extLst>
+          </p:cNvPr>
+          <p:cNvSpPr>
+            <a:spLocks noGrp="1"/>
+          </p:cNvSpPr>
+          <p:nvPr>
+            <p:ph type="ctrTitle"/>
+          </p:nvPr>
+        </p:nvSpPr>
+        <p:spPr>
+          <a:xfrm>
+            <a:off x="395536" y="188640"/>
+            <a:ext cx="7324934" cy="492443"/>
+          </a:xfrm>
+        </p:spPr>
+        <p:txBody>
+          <a:bodyPr/>
+          <a:lstStyle/>
+          <a:p>
+            <a:r>
+              <a:rPr lang="en-US" sz="3200" dirty="0"/>
+              <a:t>Implementation</a:t>
+            </a:r>
+          </a:p>
+        </p:txBody>
+      </p:sp>
+      <p:pic>
+        <p:nvPicPr>
+          <p:cNvPr id="3" name="Рисунок 2">
+            <a:extLst>
+              <a:ext uri="{FF2B5EF4-FFF2-40B4-BE49-F238E27FC236}">
+                <a16:creationId xmlns:a16="http://schemas.microsoft.com/office/drawing/2014/main" id="{EAD6C6FA-D818-EE94-5F61-D40C736A6ACF}"/>
+              </a:ext>
+            </a:extLst>
+          </p:cNvPr>
+          <p:cNvPicPr>
+            <a:picLocks noChangeAspect="1"/>
+          </p:cNvPicPr>
+          <p:nvPr/>
+        </p:nvPicPr>
+        <p:blipFill>
+          <a:blip r:embed="rId2"/>
+          <a:stretch>
+            <a:fillRect/>
+          </a:stretch>
+        </p:blipFill>
+        <p:spPr>
+          <a:xfrm>
+            <a:off x="289030" y="1700808"/>
+            <a:ext cx="4733333" cy="4523809"/>
+          </a:xfrm>
+          <a:prstGeom prst="rect">
+            <a:avLst/>
+          </a:prstGeom>
+        </p:spPr>
+      </p:pic>
+      <p:pic>
+        <p:nvPicPr>
+          <p:cNvPr id="10" name="Рисунок 9">
+            <a:extLst>
+              <a:ext uri="{FF2B5EF4-FFF2-40B4-BE49-F238E27FC236}">
+                <a16:creationId xmlns:a16="http://schemas.microsoft.com/office/drawing/2014/main" id="{EA6F40A4-55B8-7EEF-571F-930D44620F3F}"/>
+              </a:ext>
+            </a:extLst>
+          </p:cNvPr>
+          <p:cNvPicPr>
+            <a:picLocks noChangeAspect="1"/>
+          </p:cNvPicPr>
+          <p:nvPr/>
+        </p:nvPicPr>
+        <p:blipFill>
+          <a:blip r:embed="rId3"/>
+          <a:stretch>
+            <a:fillRect/>
+          </a:stretch>
+        </p:blipFill>
+        <p:spPr>
+          <a:xfrm>
+            <a:off x="5304757" y="5248986"/>
+            <a:ext cx="3656927" cy="971239"/>
+          </a:xfrm>
+          <a:prstGeom prst="rect">
+            <a:avLst/>
+          </a:prstGeom>
+        </p:spPr>
+      </p:pic>
+      <p:pic>
+        <p:nvPicPr>
+          <p:cNvPr id="13" name="Рисунок 12">
+            <a:extLst>
+              <a:ext uri="{FF2B5EF4-FFF2-40B4-BE49-F238E27FC236}">
+                <a16:creationId xmlns:a16="http://schemas.microsoft.com/office/drawing/2014/main" id="{18316AE6-78B0-5165-CC0D-0CA240491150}"/>
+              </a:ext>
+            </a:extLst>
+          </p:cNvPr>
+          <p:cNvPicPr>
+            <a:picLocks noChangeAspect="1"/>
+          </p:cNvPicPr>
+          <p:nvPr/>
+        </p:nvPicPr>
+        <p:blipFill>
+          <a:blip r:embed="rId4"/>
+          <a:stretch>
+            <a:fillRect/>
+          </a:stretch>
+        </p:blipFill>
+        <p:spPr>
+          <a:xfrm>
+            <a:off x="287524" y="1132305"/>
+            <a:ext cx="3009524" cy="380952"/>
+          </a:xfrm>
+          <a:prstGeom prst="rect">
+            <a:avLst/>
+          </a:prstGeom>
+        </p:spPr>
+      </p:pic>
+    </p:spTree>
+    <p:extLst>
+      <p:ext uri="{BB962C8B-B14F-4D97-AF65-F5344CB8AC3E}">
+        <p14:creationId xmlns:p14="http://schemas.microsoft.com/office/powerpoint/2010/main" val="45883836"/>
+      </p:ext>
+    </p:extLst>
+  </p:cSld>
+  <p:clrMapOvr>
+    <a:masterClrMapping/>
+  </p:clrMapOvr>
+</p:sld>
+</file>
+
+<file path=ppt/slides/slide7.xml><?xml version="1.0" encoding="utf-8"?>
+<p:sld xmlns:a="http://schemas.openxmlformats.org/drawingml/2006/main" xmlns:r="http://schemas.openxmlformats.org/officeDocument/2006/relationships" xmlns:p="http://schemas.openxmlformats.org/presentationml/2006/main">
+  <p:cSld>
+    <p:spTree>
+      <p:nvGrpSpPr>
+        <p:cNvPr id="1" name="">
+          <a:extLst>
+            <a:ext uri="{FF2B5EF4-FFF2-40B4-BE49-F238E27FC236}">
               <a16:creationId xmlns:a16="http://schemas.microsoft.com/office/drawing/2014/main" id="{94E16961-E921-8791-4545-5BEEBA8D7168}"/>
             </a:ext>
           </a:extLst>
@@ -7948,7 +8558,7 @@
               <a:pPr>
                 <a:defRPr/>
               </a:pPr>
-              <a:t>6</a:t>
+              <a:t>7</a:t>
             </a:fld>
             <a:r>
               <a:rPr lang="de-DE"/>
@@ -8064,7 +8674,7 @@
 </p:sld>
 </file>
 
-<file path=ppt/slides/slide7.xml><?xml version="1.0" encoding="utf-8"?>
+<file path=ppt/slides/slide8.xml><?xml version="1.0" encoding="utf-8"?>
 <p:sld xmlns:a="http://schemas.openxmlformats.org/drawingml/2006/main" xmlns:r="http://schemas.openxmlformats.org/officeDocument/2006/relationships" xmlns:p="http://schemas.openxmlformats.org/presentationml/2006/main">
   <p:cSld>
     <p:spTree>
@@ -8191,7 +8801,7 @@
               <a:pPr>
                 <a:defRPr/>
               </a:pPr>
-              <a:t>7</a:t>
+              <a:t>8</a:t>
             </a:fld>
             <a:r>
               <a:rPr lang="de-DE"/>
@@ -8401,7 +9011,7 @@
 </p:sld>
 </file>
 
-<file path=ppt/slides/slide8.xml><?xml version="1.0" encoding="utf-8"?>
+<file path=ppt/slides/slide9.xml><?xml version="1.0" encoding="utf-8"?>
 <p:sld xmlns:a="http://schemas.openxmlformats.org/drawingml/2006/main" xmlns:r="http://schemas.openxmlformats.org/officeDocument/2006/relationships" xmlns:p="http://schemas.openxmlformats.org/presentationml/2006/main">
   <p:cSld>
     <p:spTree>
@@ -8528,7 +9138,7 @@
               <a:pPr>
                 <a:defRPr/>
               </a:pPr>
-              <a:t>8</a:t>
+              <a:t>9</a:t>
             </a:fld>
             <a:r>
               <a:rPr lang="de-DE"/>
@@ -8728,342 +9338,6 @@
     <p:extLst>
       <p:ext uri="{BB962C8B-B14F-4D97-AF65-F5344CB8AC3E}">
         <p14:creationId xmlns:p14="http://schemas.microsoft.com/office/powerpoint/2010/main" val="1520041212"/>
-      </p:ext>
-    </p:extLst>
-  </p:cSld>
-  <p:clrMapOvr>
-    <a:masterClrMapping/>
-  </p:clrMapOvr>
-</p:sld>
-</file>
-
-<file path=ppt/slides/slide9.xml><?xml version="1.0" encoding="utf-8"?>
-<p:sld xmlns:a="http://schemas.openxmlformats.org/drawingml/2006/main" xmlns:r="http://schemas.openxmlformats.org/officeDocument/2006/relationships" xmlns:p="http://schemas.openxmlformats.org/presentationml/2006/main">
-  <p:cSld>
-    <p:spTree>
-      <p:nvGrpSpPr>
-        <p:cNvPr id="1" name="">
-          <a:extLst>
-            <a:ext uri="{FF2B5EF4-FFF2-40B4-BE49-F238E27FC236}">
-              <a16:creationId xmlns:a16="http://schemas.microsoft.com/office/drawing/2014/main" id="{76E3105A-C4D2-892A-4EB4-12716E07B0CC}"/>
-            </a:ext>
-          </a:extLst>
-        </p:cNvPr>
-        <p:cNvGrpSpPr/>
-        <p:nvPr/>
-      </p:nvGrpSpPr>
-      <p:grpSpPr>
-        <a:xfrm>
-          <a:off x="0" y="0"/>
-          <a:ext cx="0" cy="0"/>
-          <a:chOff x="0" y="0"/>
-          <a:chExt cx="0" cy="0"/>
-        </a:xfrm>
-      </p:grpSpPr>
-      <p:sp>
-        <p:nvSpPr>
-          <p:cNvPr id="4" name="Нижний колонтитул 3">
-            <a:extLst>
-              <a:ext uri="{FF2B5EF4-FFF2-40B4-BE49-F238E27FC236}">
-                <a16:creationId xmlns:a16="http://schemas.microsoft.com/office/drawing/2014/main" id="{E1BBCD59-FA68-9F40-CEEA-9E98F6C41B6F}"/>
-              </a:ext>
-            </a:extLst>
-          </p:cNvPr>
-          <p:cNvSpPr>
-            <a:spLocks noGrp="1"/>
-          </p:cNvSpPr>
-          <p:nvPr>
-            <p:ph type="ftr" sz="quarter" idx="10"/>
-          </p:nvPr>
-        </p:nvSpPr>
-        <p:spPr/>
-        <p:txBody>
-          <a:bodyPr/>
-          <a:lstStyle/>
-          <a:p>
-            <a:pPr>
-              <a:defRPr/>
-            </a:pPr>
-            <a:r>
-              <a:rPr lang="de-DE" dirty="0"/>
-              <a:t>Oleg Kelner – University </a:t>
-            </a:r>
-            <a:r>
-              <a:rPr lang="de-DE" dirty="0" err="1"/>
-              <a:t>of</a:t>
-            </a:r>
-            <a:r>
-              <a:rPr lang="de-DE" dirty="0"/>
-              <a:t> Applied Sciences Hamm-Lippstadt</a:t>
-            </a:r>
-          </a:p>
-        </p:txBody>
-      </p:sp>
-      <p:sp>
-        <p:nvSpPr>
-          <p:cNvPr id="5" name="Дата 4">
-            <a:extLst>
-              <a:ext uri="{FF2B5EF4-FFF2-40B4-BE49-F238E27FC236}">
-                <a16:creationId xmlns:a16="http://schemas.microsoft.com/office/drawing/2014/main" id="{96A274D8-6209-481A-040E-F235ADFCAA2B}"/>
-              </a:ext>
-            </a:extLst>
-          </p:cNvPr>
-          <p:cNvSpPr>
-            <a:spLocks noGrp="1"/>
-          </p:cNvSpPr>
-          <p:nvPr>
-            <p:ph type="dt" sz="half" idx="12"/>
-          </p:nvPr>
-        </p:nvSpPr>
-        <p:spPr/>
-        <p:txBody>
-          <a:bodyPr/>
-          <a:lstStyle/>
-          <a:p>
-            <a:pPr>
-              <a:defRPr/>
-            </a:pPr>
-            <a:fld id="{D1C5E747-687F-9C49-A498-1184E7908D39}" type="datetime1">
-              <a:rPr lang="de-DE" smtClean="0"/>
-              <a:t>29.06.2026</a:t>
-            </a:fld>
-            <a:endParaRPr lang="de-DE"/>
-          </a:p>
-        </p:txBody>
-      </p:sp>
-      <p:sp>
-        <p:nvSpPr>
-          <p:cNvPr id="6" name="Номер слайда 5">
-            <a:extLst>
-              <a:ext uri="{FF2B5EF4-FFF2-40B4-BE49-F238E27FC236}">
-                <a16:creationId xmlns:a16="http://schemas.microsoft.com/office/drawing/2014/main" id="{E3F7F71E-E821-E6EF-CB50-76F0653A30FF}"/>
-              </a:ext>
-            </a:extLst>
-          </p:cNvPr>
-          <p:cNvSpPr>
-            <a:spLocks noGrp="1"/>
-          </p:cNvSpPr>
-          <p:nvPr>
-            <p:ph type="sldNum" sz="quarter" idx="13"/>
-          </p:nvPr>
-        </p:nvSpPr>
-        <p:spPr/>
-        <p:txBody>
-          <a:bodyPr/>
-          <a:lstStyle/>
-          <a:p>
-            <a:pPr>
-              <a:defRPr/>
-            </a:pPr>
-            <a:r>
-              <a:rPr lang="de-DE"/>
-              <a:t>&lt; </a:t>
-            </a:r>
-            <a:fld id="{1A61C92B-C297-4AC9-B551-2D8A658A0122}" type="slidenum">
-              <a:rPr lang="de-DE" smtClean="0"/>
-              <a:pPr>
-                <a:defRPr/>
-              </a:pPr>
-              <a:t>9</a:t>
-            </a:fld>
-            <a:r>
-              <a:rPr lang="de-DE"/>
-              <a:t> &gt;</a:t>
-            </a:r>
-            <a:endParaRPr lang="de-DE" dirty="0"/>
-          </a:p>
-        </p:txBody>
-      </p:sp>
-      <p:sp>
-        <p:nvSpPr>
-          <p:cNvPr id="7" name="Заголовок 1">
-            <a:extLst>
-              <a:ext uri="{FF2B5EF4-FFF2-40B4-BE49-F238E27FC236}">
-                <a16:creationId xmlns:a16="http://schemas.microsoft.com/office/drawing/2014/main" id="{6A229989-FD2A-1B0C-3F55-891E3511A7C8}"/>
-              </a:ext>
-            </a:extLst>
-          </p:cNvPr>
-          <p:cNvSpPr>
-            <a:spLocks noGrp="1"/>
-          </p:cNvSpPr>
-          <p:nvPr>
-            <p:ph type="ctrTitle"/>
-          </p:nvPr>
-        </p:nvSpPr>
-        <p:spPr>
-          <a:xfrm>
-            <a:off x="395536" y="188640"/>
-            <a:ext cx="7324934" cy="492443"/>
-          </a:xfrm>
-        </p:spPr>
-        <p:txBody>
-          <a:bodyPr/>
-          <a:lstStyle/>
-          <a:p>
-            <a:r>
-              <a:rPr lang="en-US" sz="3200" dirty="0"/>
-              <a:t>Implementation</a:t>
-            </a:r>
-          </a:p>
-        </p:txBody>
-      </p:sp>
-      <p:pic>
-        <p:nvPicPr>
-          <p:cNvPr id="3" name="Рисунок 2">
-            <a:extLst>
-              <a:ext uri="{FF2B5EF4-FFF2-40B4-BE49-F238E27FC236}">
-                <a16:creationId xmlns:a16="http://schemas.microsoft.com/office/drawing/2014/main" id="{B076BC7C-FB22-1658-A6E7-58632D4E9D57}"/>
-              </a:ext>
-            </a:extLst>
-          </p:cNvPr>
-          <p:cNvPicPr>
-            <a:picLocks noChangeAspect="1"/>
-          </p:cNvPicPr>
-          <p:nvPr/>
-        </p:nvPicPr>
-        <p:blipFill>
-          <a:blip r:embed="rId2"/>
-          <a:srcRect/>
-          <a:stretch/>
-        </p:blipFill>
-        <p:spPr>
-          <a:xfrm>
-            <a:off x="791999" y="968735"/>
-            <a:ext cx="7560000" cy="5400000"/>
-          </a:xfrm>
-          <a:prstGeom prst="rect">
-            <a:avLst/>
-          </a:prstGeom>
-        </p:spPr>
-      </p:pic>
-      <mc:AlternateContent xmlns:mc="http://schemas.openxmlformats.org/markup-compatibility/2006" xmlns:a14="http://schemas.microsoft.com/office/drawing/2010/main">
-        <mc:Choice Requires="a14">
-          <p:sp>
-            <p:nvSpPr>
-              <p:cNvPr id="8" name="TextBox 7">
-                <a:extLst>
-                  <a:ext uri="{FF2B5EF4-FFF2-40B4-BE49-F238E27FC236}">
-                    <a16:creationId xmlns:a16="http://schemas.microsoft.com/office/drawing/2014/main" id="{00135A5B-A4E8-6770-7B60-12D1E97CCF10}"/>
-                  </a:ext>
-                </a:extLst>
-              </p:cNvPr>
-              <p:cNvSpPr txBox="1"/>
-              <p:nvPr/>
-            </p:nvSpPr>
-            <p:spPr>
-              <a:xfrm>
-                <a:off x="-360548" y="5868598"/>
-                <a:ext cx="4576396" cy="500137"/>
-              </a:xfrm>
-              <a:prstGeom prst="rect">
-                <a:avLst/>
-              </a:prstGeom>
-              <a:noFill/>
-            </p:spPr>
-            <p:txBody>
-              <a:bodyPr wrap="square">
-                <a:spAutoFit/>
-              </a:bodyPr>
-              <a:lstStyle/>
-              <a:p>
-                <a:pPr>
-                  <a:lnSpc>
-                    <a:spcPct val="150000"/>
-                  </a:lnSpc>
-                </a:pPr>
-                <a14:m>
-                  <m:oMathPara xmlns:m="http://schemas.openxmlformats.org/officeDocument/2006/math">
-                    <m:oMathParaPr>
-                      <m:jc m:val="centerGroup"/>
-                    </m:oMathParaPr>
-                    <m:oMath xmlns:m="http://schemas.openxmlformats.org/officeDocument/2006/math">
-                      <m:r>
-                        <a:rPr lang="en-US" sz="1600" b="0" i="1" smtClean="0">
-                          <a:latin typeface="Cambria Math" panose="02040503050406030204" pitchFamily="18" charset="0"/>
-                        </a:rPr>
-                        <m:t>𝐶</m:t>
-                      </m:r>
-                      <m:r>
-                        <a:rPr lang="en-US" sz="1600" b="0" i="1" smtClean="0">
-                          <a:latin typeface="Cambria Math" panose="02040503050406030204" pitchFamily="18" charset="0"/>
-                        </a:rPr>
-                        <m:t>=0.25∗</m:t>
-                      </m:r>
-                      <m:r>
-                        <a:rPr lang="en-US" sz="1600" b="0" i="1" smtClean="0">
-                          <a:latin typeface="Cambria Math" panose="02040503050406030204" pitchFamily="18" charset="0"/>
-                        </a:rPr>
-                        <m:t>𝑙𝑎𝑡𝑒𝑛𝑐𝑦</m:t>
-                      </m:r>
-                      <m:r>
-                        <a:rPr lang="en-US" sz="1600" b="0" i="1" smtClean="0">
-                          <a:latin typeface="Cambria Math" panose="02040503050406030204" pitchFamily="18" charset="0"/>
-                        </a:rPr>
-                        <m:t>+0.75∗</m:t>
-                      </m:r>
-                      <m:r>
-                        <a:rPr lang="en-US" sz="1600" b="0" i="1" smtClean="0">
-                          <a:latin typeface="Cambria Math" panose="02040503050406030204" pitchFamily="18" charset="0"/>
-                        </a:rPr>
-                        <m:t>𝑎𝑟𝑒𝑎</m:t>
-                      </m:r>
-                    </m:oMath>
-                  </m:oMathPara>
-                </a14:m>
-                <a:endParaRPr lang="en-US" sz="1600" dirty="0"/>
-              </a:p>
-            </p:txBody>
-          </p:sp>
-        </mc:Choice>
-        <mc:Fallback xmlns="">
-          <p:sp>
-            <p:nvSpPr>
-              <p:cNvPr id="8" name="TextBox 7">
-                <a:extLst>
-                  <a:ext uri="{FF2B5EF4-FFF2-40B4-BE49-F238E27FC236}">
-                    <a16:creationId xmlns:a16="http://schemas.microsoft.com/office/drawing/2014/main" id="{00135A5B-A4E8-6770-7B60-12D1E97CCF10}"/>
-                  </a:ext>
-                </a:extLst>
-              </p:cNvPr>
-              <p:cNvSpPr txBox="1">
-                <a:spLocks noRot="1" noChangeAspect="1" noMove="1" noResize="1" noEditPoints="1" noAdjustHandles="1" noChangeArrowheads="1" noChangeShapeType="1" noTextEdit="1"/>
-              </p:cNvSpPr>
-              <p:nvPr/>
-            </p:nvSpPr>
-            <p:spPr>
-              <a:xfrm>
-                <a:off x="-360548" y="5868598"/>
-                <a:ext cx="4576396" cy="500137"/>
-              </a:xfrm>
-              <a:prstGeom prst="rect">
-                <a:avLst/>
-              </a:prstGeom>
-              <a:blipFill>
-                <a:blip r:embed="rId3"/>
-                <a:stretch>
-                  <a:fillRect/>
-                </a:stretch>
-              </a:blipFill>
-            </p:spPr>
-            <p:txBody>
-              <a:bodyPr/>
-              <a:lstStyle/>
-              <a:p>
-                <a:r>
-                  <a:rPr lang="en-US">
-                    <a:noFill/>
-                  </a:rPr>
-                  <a:t> </a:t>
-                </a:r>
-              </a:p>
-            </p:txBody>
-          </p:sp>
-        </mc:Fallback>
-      </mc:AlternateContent>
-    </p:spTree>
-    <p:extLst>
-      <p:ext uri="{BB962C8B-B14F-4D97-AF65-F5344CB8AC3E}">
-        <p14:creationId xmlns:p14="http://schemas.microsoft.com/office/powerpoint/2010/main" val="4089268273"/>
       </p:ext>
     </p:extLst>
   </p:cSld>

--- a/SAS_presentation/SAS_Presentation.pptx
+++ b/SAS_presentation/SAS_Presentation.pptx
@@ -388,14 +388,14 @@
           </a:ln>
           <a:extLst>
             <a:ext uri="{909E8E84-426E-40dd-AFC4-6F175D3DCCD1}">
-              <a14:hiddenFill xmlns="" xmlns:a14="http://schemas.microsoft.com/office/drawing/2010/main">
+              <a14:hiddenFill xmlns:a14="http://schemas.microsoft.com/office/drawing/2010/main" xmlns="">
                 <a:solidFill>
                   <a:srgbClr val="FFFFFF"/>
                 </a:solidFill>
               </a14:hiddenFill>
             </a:ext>
             <a:ext uri="{91240B29-F687-4f45-9708-019B960494DF}">
-              <a14:hiddenLine xmlns="" xmlns:a14="http://schemas.microsoft.com/office/drawing/2010/main" w="9525">
+              <a14:hiddenLine xmlns:a14="http://schemas.microsoft.com/office/drawing/2010/main" xmlns="" w="9525">
                 <a:solidFill>
                   <a:srgbClr val="000000"/>
                 </a:solidFill>
@@ -448,14 +448,14 @@
           </a:ln>
           <a:extLst>
             <a:ext uri="{909E8E84-426E-40dd-AFC4-6F175D3DCCD1}">
-              <a14:hiddenFill xmlns="" xmlns:a14="http://schemas.microsoft.com/office/drawing/2010/main">
+              <a14:hiddenFill xmlns:a14="http://schemas.microsoft.com/office/drawing/2010/main" xmlns="">
                 <a:solidFill>
                   <a:srgbClr val="FFFFFF"/>
                 </a:solidFill>
               </a14:hiddenFill>
             </a:ext>
             <a:ext uri="{91240B29-F687-4f45-9708-019B960494DF}">
-              <a14:hiddenLine xmlns="" xmlns:a14="http://schemas.microsoft.com/office/drawing/2010/main" w="9525">
+              <a14:hiddenLine xmlns:a14="http://schemas.microsoft.com/office/drawing/2010/main" xmlns="" w="9525">
                 <a:solidFill>
                   <a:srgbClr val="000000"/>
                 </a:solidFill>
@@ -529,7 +529,7 @@
           </a:ln>
           <a:extLst>
             <a:ext uri="{909E8E84-426E-40dd-AFC4-6F175D3DCCD1}">
-              <a14:hiddenFill xmlns="" xmlns:a14="http://schemas.microsoft.com/office/drawing/2010/main">
+              <a14:hiddenFill xmlns:a14="http://schemas.microsoft.com/office/drawing/2010/main" xmlns="">
                 <a:noFill/>
               </a14:hiddenFill>
             </a:ext>
@@ -569,7 +569,7 @@
           </a:ln>
           <a:extLst>
             <a:ext uri="{91240B29-F687-4f45-9708-019B960494DF}">
-              <a14:hiddenLine xmlns="" xmlns:a14="http://schemas.microsoft.com/office/drawing/2010/main" w="9525">
+              <a14:hiddenLine xmlns:a14="http://schemas.microsoft.com/office/drawing/2010/main" xmlns="" w="9525">
                 <a:solidFill>
                   <a:srgbClr val="000000"/>
                 </a:solidFill>
@@ -615,7 +615,7 @@
           </a:ln>
           <a:extLst>
             <a:ext uri="{909E8E84-426E-40dd-AFC4-6F175D3DCCD1}">
-              <a14:hiddenFill xmlns="" xmlns:a14="http://schemas.microsoft.com/office/drawing/2010/main">
+              <a14:hiddenFill xmlns:a14="http://schemas.microsoft.com/office/drawing/2010/main" xmlns="">
                 <a:noFill/>
               </a14:hiddenFill>
             </a:ext>
@@ -656,7 +656,7 @@
           </a:ln>
           <a:extLst>
             <a:ext uri="{909E8E84-426E-40dd-AFC4-6F175D3DCCD1}">
-              <a14:hiddenFill xmlns="" xmlns:a14="http://schemas.microsoft.com/office/drawing/2010/main">
+              <a14:hiddenFill xmlns:a14="http://schemas.microsoft.com/office/drawing/2010/main" xmlns="">
                 <a:noFill/>
               </a14:hiddenFill>
             </a:ext>
@@ -705,14 +705,14 @@
           </a:ln>
           <a:extLst>
             <a:ext uri="{909E8E84-426E-40dd-AFC4-6F175D3DCCD1}">
-              <a14:hiddenFill xmlns="" xmlns:a14="http://schemas.microsoft.com/office/drawing/2010/main">
+              <a14:hiddenFill xmlns:a14="http://schemas.microsoft.com/office/drawing/2010/main" xmlns="">
                 <a:solidFill>
                   <a:srgbClr val="FFFFFF"/>
                 </a:solidFill>
               </a14:hiddenFill>
             </a:ext>
             <a:ext uri="{91240B29-F687-4f45-9708-019B960494DF}">
-              <a14:hiddenLine xmlns="" xmlns:a14="http://schemas.microsoft.com/office/drawing/2010/main" w="9525">
+              <a14:hiddenLine xmlns:a14="http://schemas.microsoft.com/office/drawing/2010/main" xmlns="" w="9525">
                 <a:solidFill>
                   <a:srgbClr val="000000"/>
                 </a:solidFill>
@@ -790,7 +790,7 @@
           </a:ln>
           <a:extLst>
             <a:ext uri="{909E8E84-426E-40dd-AFC4-6F175D3DCCD1}">
-              <a14:hiddenFill xmlns="" xmlns:a14="http://schemas.microsoft.com/office/drawing/2010/main">
+              <a14:hiddenFill xmlns:a14="http://schemas.microsoft.com/office/drawing/2010/main" xmlns="">
                 <a:solidFill>
                   <a:srgbClr val="FFFFFF"/>
                 </a:solidFill>
@@ -1018,14 +1018,14 @@
           </a:ln>
           <a:extLst>
             <a:ext uri="{909E8E84-426E-40dd-AFC4-6F175D3DCCD1}">
-              <a14:hiddenFill xmlns="" xmlns:a14="http://schemas.microsoft.com/office/drawing/2010/main">
+              <a14:hiddenFill xmlns:a14="http://schemas.microsoft.com/office/drawing/2010/main" xmlns="">
                 <a:solidFill>
                   <a:srgbClr val="FFFFFF"/>
                 </a:solidFill>
               </a14:hiddenFill>
             </a:ext>
             <a:ext uri="{91240B29-F687-4f45-9708-019B960494DF}">
-              <a14:hiddenLine xmlns="" xmlns:a14="http://schemas.microsoft.com/office/drawing/2010/main" w="9525">
+              <a14:hiddenLine xmlns:a14="http://schemas.microsoft.com/office/drawing/2010/main" xmlns="" w="9525">
                 <a:solidFill>
                   <a:srgbClr val="000000"/>
                 </a:solidFill>
@@ -1080,14 +1080,14 @@
           </a:ln>
           <a:extLst>
             <a:ext uri="{909E8E84-426E-40dd-AFC4-6F175D3DCCD1}">
-              <a14:hiddenFill xmlns="" xmlns:a14="http://schemas.microsoft.com/office/drawing/2010/main">
+              <a14:hiddenFill xmlns:a14="http://schemas.microsoft.com/office/drawing/2010/main" xmlns="">
                 <a:solidFill>
                   <a:srgbClr val="FFFFFF"/>
                 </a:solidFill>
               </a14:hiddenFill>
             </a:ext>
             <a:ext uri="{91240B29-F687-4f45-9708-019B960494DF}">
-              <a14:hiddenLine xmlns="" xmlns:a14="http://schemas.microsoft.com/office/drawing/2010/main" w="9525">
+              <a14:hiddenLine xmlns:a14="http://schemas.microsoft.com/office/drawing/2010/main" xmlns="" w="9525">
                 <a:solidFill>
                   <a:srgbClr val="000000"/>
                 </a:solidFill>
@@ -1165,7 +1165,7 @@
           </a:ln>
           <a:extLst>
             <a:ext uri="{909E8E84-426E-40dd-AFC4-6F175D3DCCD1}">
-              <a14:hiddenFill xmlns="" xmlns:a14="http://schemas.microsoft.com/office/drawing/2010/main">
+              <a14:hiddenFill xmlns:a14="http://schemas.microsoft.com/office/drawing/2010/main" xmlns="">
                 <a:noFill/>
               </a14:hiddenFill>
             </a:ext>
@@ -1205,7 +1205,7 @@
           </a:ln>
           <a:extLst>
             <a:ext uri="{91240B29-F687-4f45-9708-019B960494DF}">
-              <a14:hiddenLine xmlns="" xmlns:a14="http://schemas.microsoft.com/office/drawing/2010/main" w="9525">
+              <a14:hiddenLine xmlns:a14="http://schemas.microsoft.com/office/drawing/2010/main" xmlns="" w="9525">
                 <a:solidFill>
                   <a:srgbClr val="000000"/>
                 </a:solidFill>
@@ -1251,7 +1251,7 @@
           </a:ln>
           <a:extLst>
             <a:ext uri="{909E8E84-426E-40dd-AFC4-6F175D3DCCD1}">
-              <a14:hiddenFill xmlns="" xmlns:a14="http://schemas.microsoft.com/office/drawing/2010/main">
+              <a14:hiddenFill xmlns:a14="http://schemas.microsoft.com/office/drawing/2010/main" xmlns="">
                 <a:noFill/>
               </a14:hiddenFill>
             </a:ext>
@@ -1292,7 +1292,7 @@
           </a:ln>
           <a:extLst>
             <a:ext uri="{909E8E84-426E-40dd-AFC4-6F175D3DCCD1}">
-              <a14:hiddenFill xmlns="" xmlns:a14="http://schemas.microsoft.com/office/drawing/2010/main">
+              <a14:hiddenFill xmlns:a14="http://schemas.microsoft.com/office/drawing/2010/main" xmlns="">
                 <a:noFill/>
               </a14:hiddenFill>
             </a:ext>
@@ -1341,14 +1341,14 @@
           </a:ln>
           <a:extLst>
             <a:ext uri="{909E8E84-426E-40dd-AFC4-6F175D3DCCD1}">
-              <a14:hiddenFill xmlns="" xmlns:a14="http://schemas.microsoft.com/office/drawing/2010/main">
+              <a14:hiddenFill xmlns:a14="http://schemas.microsoft.com/office/drawing/2010/main" xmlns="">
                 <a:solidFill>
                   <a:srgbClr val="FFFFFF"/>
                 </a:solidFill>
               </a14:hiddenFill>
             </a:ext>
             <a:ext uri="{91240B29-F687-4f45-9708-019B960494DF}">
-              <a14:hiddenLine xmlns="" xmlns:a14="http://schemas.microsoft.com/office/drawing/2010/main" w="9525">
+              <a14:hiddenLine xmlns:a14="http://schemas.microsoft.com/office/drawing/2010/main" xmlns="" w="9525">
                 <a:solidFill>
                   <a:srgbClr val="000000"/>
                 </a:solidFill>
@@ -1538,7 +1538,7 @@
           </a:ln>
           <a:extLst>
             <a:ext uri="{909E8E84-426E-40dd-AFC4-6F175D3DCCD1}">
-              <a14:hiddenFill xmlns="" xmlns:a14="http://schemas.microsoft.com/office/drawing/2010/main">
+              <a14:hiddenFill xmlns:a14="http://schemas.microsoft.com/office/drawing/2010/main" xmlns="">
                 <a:noFill/>
               </a14:hiddenFill>
             </a:ext>
@@ -3650,14 +3650,14 @@
           </a:ln>
           <a:extLst>
             <a:ext uri="{909E8E84-426E-40dd-AFC4-6F175D3DCCD1}">
-              <a14:hiddenFill xmlns="" xmlns:a14="http://schemas.microsoft.com/office/drawing/2010/main">
+              <a14:hiddenFill xmlns:a14="http://schemas.microsoft.com/office/drawing/2010/main" xmlns="">
                 <a:solidFill>
                   <a:srgbClr val="FFFFFF"/>
                 </a:solidFill>
               </a14:hiddenFill>
             </a:ext>
             <a:ext uri="{91240B29-F687-4f45-9708-019B960494DF}">
-              <a14:hiddenLine xmlns="" xmlns:a14="http://schemas.microsoft.com/office/drawing/2010/main" w="9525">
+              <a14:hiddenLine xmlns:a14="http://schemas.microsoft.com/office/drawing/2010/main" xmlns="" w="9525">
                 <a:solidFill>
                   <a:srgbClr val="000000"/>
                 </a:solidFill>
@@ -3708,14 +3708,14 @@
           </a:ln>
           <a:extLst>
             <a:ext uri="{909E8E84-426E-40dd-AFC4-6F175D3DCCD1}">
-              <a14:hiddenFill xmlns="" xmlns:a14="http://schemas.microsoft.com/office/drawing/2010/main">
+              <a14:hiddenFill xmlns:a14="http://schemas.microsoft.com/office/drawing/2010/main" xmlns="">
                 <a:solidFill>
                   <a:srgbClr val="FFFFFF"/>
                 </a:solidFill>
               </a14:hiddenFill>
             </a:ext>
             <a:ext uri="{91240B29-F687-4f45-9708-019B960494DF}">
-              <a14:hiddenLine xmlns="" xmlns:a14="http://schemas.microsoft.com/office/drawing/2010/main" w="9525">
+              <a14:hiddenLine xmlns:a14="http://schemas.microsoft.com/office/drawing/2010/main" xmlns="" w="9525">
                 <a:solidFill>
                   <a:srgbClr val="000000"/>
                 </a:solidFill>
@@ -3952,7 +3952,7 @@
           </a:ln>
           <a:extLst>
             <a:ext uri="{909E8E84-426E-40dd-AFC4-6F175D3DCCD1}">
-              <a14:hiddenFill xmlns="" xmlns:a14="http://schemas.microsoft.com/office/drawing/2010/main">
+              <a14:hiddenFill xmlns:a14="http://schemas.microsoft.com/office/drawing/2010/main" xmlns="">
                 <a:noFill/>
               </a14:hiddenFill>
             </a:ext>
@@ -6692,8 +6692,8 @@
         </p:blipFill>
         <p:spPr>
           <a:xfrm>
-            <a:off x="1661942" y="3107294"/>
-            <a:ext cx="5820116" cy="2705700"/>
+            <a:off x="4366659" y="3846494"/>
+            <a:ext cx="4632418" cy="2153554"/>
           </a:xfrm>
           <a:prstGeom prst="rect">
             <a:avLst/>
@@ -6918,6 +6918,146 @@
             <a:r>
               <a:rPr lang="en-US" dirty="0"/>
               <a:t>Underlying physics principle – annealing is a heat treatment process that alters a material's microstructure to increase its ductility, reduce hardness, and relieve internal stresses.</a:t>
+            </a:r>
+          </a:p>
+        </p:txBody>
+      </p:sp>
+      <p:sp>
+        <p:nvSpPr>
+          <p:cNvPr id="8" name="TextBox 7">
+            <a:extLst>
+              <a:ext uri="{FF2B5EF4-FFF2-40B4-BE49-F238E27FC236}">
+                <a16:creationId xmlns:a16="http://schemas.microsoft.com/office/drawing/2014/main" id="{4C21DF72-2A78-CF89-C8B8-2EC2B25D68E4}"/>
+              </a:ext>
+            </a:extLst>
+          </p:cNvPr>
+          <p:cNvSpPr txBox="1"/>
+          <p:nvPr/>
+        </p:nvSpPr>
+        <p:spPr>
+          <a:xfrm>
+            <a:off x="5995381" y="6215439"/>
+            <a:ext cx="3148619" cy="285014"/>
+          </a:xfrm>
+          <a:prstGeom prst="rect">
+            <a:avLst/>
+          </a:prstGeom>
+          <a:noFill/>
+        </p:spPr>
+        <p:txBody>
+          <a:bodyPr wrap="none" rtlCol="0">
+            <a:spAutoFit/>
+          </a:bodyPr>
+          <a:lstStyle/>
+          <a:p>
+            <a:r>
+              <a:rPr lang="en-US" sz="1000" dirty="0"/>
+              <a:t>https://wanzhifence.com/why-choose-annealed-wire/</a:t>
+            </a:r>
+          </a:p>
+        </p:txBody>
+      </p:sp>
+      <p:pic>
+        <p:nvPicPr>
+          <p:cNvPr id="9" name="Рисунок 8">
+            <a:extLst>
+              <a:ext uri="{FF2B5EF4-FFF2-40B4-BE49-F238E27FC236}">
+                <a16:creationId xmlns:a16="http://schemas.microsoft.com/office/drawing/2014/main" id="{9F88C0CD-FA68-8B59-30D6-80DC3FA2E6DC}"/>
+              </a:ext>
+            </a:extLst>
+          </p:cNvPr>
+          <p:cNvPicPr>
+            <a:picLocks noChangeAspect="1"/>
+          </p:cNvPicPr>
+          <p:nvPr/>
+        </p:nvPicPr>
+        <p:blipFill>
+          <a:blip r:embed="rId3"/>
+          <a:stretch>
+            <a:fillRect/>
+          </a:stretch>
+        </p:blipFill>
+        <p:spPr>
+          <a:xfrm>
+            <a:off x="401517" y="3572437"/>
+            <a:ext cx="3770888" cy="2427611"/>
+          </a:xfrm>
+          <a:prstGeom prst="rect">
+            <a:avLst/>
+          </a:prstGeom>
+        </p:spPr>
+      </p:pic>
+      <p:sp>
+        <p:nvSpPr>
+          <p:cNvPr id="12" name="TextBox 11">
+            <a:extLst>
+              <a:ext uri="{FF2B5EF4-FFF2-40B4-BE49-F238E27FC236}">
+                <a16:creationId xmlns:a16="http://schemas.microsoft.com/office/drawing/2014/main" id="{C9DE2495-B96E-8DD5-37FC-10F2EEBBC84C}"/>
+              </a:ext>
+            </a:extLst>
+          </p:cNvPr>
+          <p:cNvSpPr txBox="1"/>
+          <p:nvPr/>
+        </p:nvSpPr>
+        <p:spPr>
+          <a:xfrm>
+            <a:off x="-5485" y="6105371"/>
+            <a:ext cx="4576396" cy="623248"/>
+          </a:xfrm>
+          <a:prstGeom prst="rect">
+            <a:avLst/>
+          </a:prstGeom>
+          <a:noFill/>
+        </p:spPr>
+        <p:txBody>
+          <a:bodyPr wrap="square">
+            <a:spAutoFit/>
+          </a:bodyPr>
+          <a:lstStyle/>
+          <a:p>
+            <a:pPr>
+              <a:lnSpc>
+                <a:spcPct val="100000"/>
+              </a:lnSpc>
+            </a:pPr>
+            <a:r>
+              <a:rPr lang="en-US" sz="800" dirty="0"/>
+              <a:t>M. </a:t>
+            </a:r>
+            <a:r>
+              <a:rPr lang="en-US" sz="800" dirty="0" err="1"/>
+              <a:t>Blocho</a:t>
+            </a:r>
+            <a:r>
+              <a:rPr lang="en-US" sz="800" dirty="0"/>
+              <a:t>, ‘Heuristics, metaheuristics, and </a:t>
+            </a:r>
+            <a:r>
+              <a:rPr lang="en-US" sz="800" dirty="0" err="1"/>
+              <a:t>hyperheuristics</a:t>
+            </a:r>
+            <a:r>
+              <a:rPr lang="en-US" sz="800" dirty="0"/>
+              <a:t> for rich vehicle routing problems’, Smart Delivery Systems: Solving Complex Vehicle Routing Problems, pp. 101–156, Jan. 2020, </a:t>
+            </a:r>
+            <a:r>
+              <a:rPr lang="en-US" sz="800" dirty="0" err="1"/>
+              <a:t>doi</a:t>
+            </a:r>
+            <a:r>
+              <a:rPr lang="en-US" sz="800" dirty="0"/>
+              <a:t>: 10.1016/B978-0-12-815715-2.00009-9.</a:t>
+            </a:r>
+          </a:p>
+          <a:p>
+            <a:pPr>
+              <a:lnSpc>
+                <a:spcPct val="100000"/>
+              </a:lnSpc>
+            </a:pPr>
+            <a:r>
+              <a:rPr lang="en-US" sz="800" dirty="0"/>
+              <a:t> </a:t>
             </a:r>
           </a:p>
         </p:txBody>
